--- a/materialien/Welt5_Netz/1_Praesentation/KR_W5_Praesentation_Das_Netz.pptx
+++ b/materialien/Welt5_Netz/1_Praesentation/KR_W5_Praesentation_Das_Netz.pptx
@@ -137,7 +137,7 @@
   <p:extLst>
     <p:ext uri="{521415D9-36F7-43E2-AB2F-B90AF26B5E84}">
       <p14:sectionLst xmlns:p14="http://schemas.microsoft.com/office/powerpoint/2010/main">
-        <p14:section name="Fingerabdrücke" id="{a7bc3b80-3815-bb74-7d4c-ee2bcb44e601}">
+        <p14:section name="Fingerabdrücke" id="{93577f10-1180-1348-ec65-58f337f9e192}">
           <p14:sldIdLst>
             <p14:sldId id="257"/>
             <p14:sldId id="258"/>
@@ -152,7 +152,7 @@
             <p14:sldId id="267"/>
           </p14:sldIdLst>
         </p14:section>
-        <p14:section name="Das Siegel" id="{f7762d50-ebc6-b539-544a-4e401cb60a28}">
+        <p14:section name="Das Siegel" id="{c2a181c1-9c3b-06e1-9c25-703f0686a79a}">
           <p14:sldIdLst>
             <p14:sldId id="268"/>
             <p14:sldId id="269"/>
@@ -165,7 +165,7 @@
             <p14:sldId id="276"/>
           </p14:sldIdLst>
         </p14:section>
-        <p14:section name="Mallory im Netz" id="{537cb279-7a8b-ca27-6a5a-72372e5c66c7}">
+        <p14:section name="Mallory im Netz" id="{586fc49f-197b-362f-ecf6-c7cee43f71b5}">
           <p14:sldIdLst>
             <p14:sldId id="277"/>
             <p14:sldId id="278"/>
@@ -25061,7 +25061,7 @@
         <p:spPr>
           <a:xfrm>
             <a:off x="5956868" y="1325880"/>
-            <a:ext cx="5686187" cy="2685816"/>
+            <a:ext cx="5686187" cy="2555331"/>
           </a:xfrm>
           <a:prstGeom prst="rect">
             <a:avLst/>
